--- a/data/CNN/step3.pptx
+++ b/data/CNN/step3.pptx
@@ -692,9 +692,32 @@
           </a:p>
         </p:txBody>
       </p:sp>
+      <p:pic>
+        <p:nvPicPr>
+          <p:cNvPr id="8" name="" descr=""/>
+          <p:cNvPicPr/>
+          <p:nvPr/>
+        </p:nvPicPr>
+        <p:blipFill>
+          <a:blip r:embed="rId1"/>
+          <a:stretch/>
+        </p:blipFill>
+        <p:spPr>
+          <a:xfrm>
+            <a:off x="4809960" y="-190440"/>
+            <a:ext cx="2571480" cy="2571480"/>
+          </a:xfrm>
+          <a:prstGeom prst="rect">
+            <a:avLst/>
+          </a:prstGeom>
+          <a:ln w="0">
+            <a:noFill/>
+          </a:ln>
+        </p:spPr>
+      </p:pic>
       <p:sp>
         <p:nvSpPr>
-          <p:cNvPr id="8" name=""/>
+          <p:cNvPr id="9" name=""/>
           <p:cNvSpPr/>
           <p:nvPr/>
         </p:nvSpPr>
@@ -752,7 +775,7 @@
       </p:sp>
       <p:sp>
         <p:nvSpPr>
-          <p:cNvPr id="9" name=""/>
+          <p:cNvPr id="10" name=""/>
           <p:cNvSpPr txBox="1"/>
           <p:nvPr/>
         </p:nvSpPr>
@@ -795,7 +818,7 @@
       </p:sp>
       <p:sp>
         <p:nvSpPr>
-          <p:cNvPr id="10" name=""/>
+          <p:cNvPr id="11" name=""/>
           <p:cNvSpPr txBox="1"/>
           <p:nvPr/>
         </p:nvSpPr>
@@ -838,7 +861,7 @@
       </p:sp>
       <p:sp>
         <p:nvSpPr>
-          <p:cNvPr id="11" name=""/>
+          <p:cNvPr id="12" name=""/>
           <p:cNvSpPr txBox="1"/>
           <p:nvPr/>
         </p:nvSpPr>
@@ -881,7 +904,7 @@
       </p:sp>
       <p:sp>
         <p:nvSpPr>
-          <p:cNvPr id="12" name=""/>
+          <p:cNvPr id="13" name=""/>
           <p:cNvSpPr txBox="1"/>
           <p:nvPr/>
         </p:nvSpPr>
@@ -954,7 +977,7 @@
       </p:grpSpPr>
       <p:sp>
         <p:nvSpPr>
-          <p:cNvPr id="184" name=""/>
+          <p:cNvPr id="193" name=""/>
           <p:cNvSpPr/>
           <p:nvPr/>
         </p:nvSpPr>
@@ -1012,7 +1035,7 @@
       </p:sp>
       <p:sp>
         <p:nvSpPr>
-          <p:cNvPr id="185" name=""/>
+          <p:cNvPr id="194" name=""/>
           <p:cNvSpPr/>
           <p:nvPr/>
         </p:nvSpPr>
@@ -1070,7 +1093,7 @@
       </p:sp>
       <p:sp>
         <p:nvSpPr>
-          <p:cNvPr id="186" name=""/>
+          <p:cNvPr id="195" name=""/>
           <p:cNvSpPr/>
           <p:nvPr/>
         </p:nvSpPr>
@@ -1128,7 +1151,7 @@
       </p:sp>
       <p:sp>
         <p:nvSpPr>
-          <p:cNvPr id="187" name=""/>
+          <p:cNvPr id="196" name=""/>
           <p:cNvSpPr/>
           <p:nvPr/>
         </p:nvSpPr>
@@ -1346,7 +1369,7 @@
       </p:sp>
       <p:pic>
         <p:nvPicPr>
-          <p:cNvPr id="188" name="" descr=""/>
+          <p:cNvPr id="197" name="" descr=""/>
           <p:cNvPicPr/>
           <p:nvPr/>
         </p:nvPicPr>
@@ -1356,8 +1379,8 @@
         </p:blipFill>
         <p:spPr>
           <a:xfrm>
-            <a:off x="533520" y="1409760"/>
-            <a:ext cx="6095520" cy="2381040"/>
+            <a:off x="10515600" y="38160"/>
+            <a:ext cx="1142640" cy="1142640"/>
           </a:xfrm>
           <a:prstGeom prst="rect">
             <a:avLst/>
@@ -1367,9 +1390,32 @@
           </a:ln>
         </p:spPr>
       </p:pic>
+      <p:pic>
+        <p:nvPicPr>
+          <p:cNvPr id="198" name="" descr=""/>
+          <p:cNvPicPr/>
+          <p:nvPr/>
+        </p:nvPicPr>
+        <p:blipFill>
+          <a:blip r:embed="rId2"/>
+          <a:stretch/>
+        </p:blipFill>
+        <p:spPr>
+          <a:xfrm>
+            <a:off x="533520" y="1409760"/>
+            <a:ext cx="6095520" cy="2381040"/>
+          </a:xfrm>
+          <a:prstGeom prst="rect">
+            <a:avLst/>
+          </a:prstGeom>
+          <a:ln w="0">
+            <a:noFill/>
+          </a:ln>
+        </p:spPr>
+      </p:pic>
       <p:sp>
         <p:nvSpPr>
-          <p:cNvPr id="189" name=""/>
+          <p:cNvPr id="199" name=""/>
           <p:cNvSpPr txBox="1"/>
           <p:nvPr/>
         </p:nvSpPr>
@@ -1432,7 +1478,7 @@
       </p:sp>
       <p:sp>
         <p:nvSpPr>
-          <p:cNvPr id="190" name=""/>
+          <p:cNvPr id="200" name=""/>
           <p:cNvSpPr/>
           <p:nvPr/>
         </p:nvSpPr>
@@ -1638,7 +1684,7 @@
       </p:sp>
       <p:sp>
         <p:nvSpPr>
-          <p:cNvPr id="191" name=""/>
+          <p:cNvPr id="201" name=""/>
           <p:cNvSpPr txBox="1"/>
           <p:nvPr/>
         </p:nvSpPr>
@@ -1681,7 +1727,7 @@
       </p:sp>
       <p:sp>
         <p:nvSpPr>
-          <p:cNvPr id="192" name=""/>
+          <p:cNvPr id="202" name=""/>
           <p:cNvSpPr/>
           <p:nvPr/>
         </p:nvSpPr>
@@ -1887,7 +1933,7 @@
       </p:sp>
       <p:sp>
         <p:nvSpPr>
-          <p:cNvPr id="193" name=""/>
+          <p:cNvPr id="203" name=""/>
           <p:cNvSpPr txBox="1"/>
           <p:nvPr/>
         </p:nvSpPr>
@@ -1960,7 +2006,7 @@
       </p:sp>
       <p:sp>
         <p:nvSpPr>
-          <p:cNvPr id="194" name=""/>
+          <p:cNvPr id="204" name=""/>
           <p:cNvSpPr txBox="1"/>
           <p:nvPr/>
         </p:nvSpPr>
@@ -2023,7 +2069,7 @@
       </p:sp>
       <p:sp>
         <p:nvSpPr>
-          <p:cNvPr id="195" name=""/>
+          <p:cNvPr id="205" name=""/>
           <p:cNvSpPr/>
           <p:nvPr/>
         </p:nvSpPr>
@@ -2229,7 +2275,7 @@
       </p:sp>
       <p:sp>
         <p:nvSpPr>
-          <p:cNvPr id="196" name=""/>
+          <p:cNvPr id="206" name=""/>
           <p:cNvSpPr txBox="1"/>
           <p:nvPr/>
         </p:nvSpPr>
@@ -2272,7 +2318,7 @@
       </p:sp>
       <p:sp>
         <p:nvSpPr>
-          <p:cNvPr id="197" name=""/>
+          <p:cNvPr id="207" name=""/>
           <p:cNvSpPr txBox="1"/>
           <p:nvPr/>
         </p:nvSpPr>
@@ -2315,7 +2361,7 @@
       </p:sp>
       <p:sp>
         <p:nvSpPr>
-          <p:cNvPr id="198" name=""/>
+          <p:cNvPr id="208" name=""/>
           <p:cNvSpPr txBox="1"/>
           <p:nvPr/>
         </p:nvSpPr>
@@ -2358,7 +2404,7 @@
       </p:sp>
       <p:sp>
         <p:nvSpPr>
-          <p:cNvPr id="199" name=""/>
+          <p:cNvPr id="209" name=""/>
           <p:cNvSpPr/>
           <p:nvPr/>
         </p:nvSpPr>
@@ -2496,7 +2542,7 @@
       </p:sp>
       <p:sp>
         <p:nvSpPr>
-          <p:cNvPr id="200" name=""/>
+          <p:cNvPr id="210" name=""/>
           <p:cNvSpPr txBox="1"/>
           <p:nvPr/>
         </p:nvSpPr>
@@ -2549,7 +2595,7 @@
       </p:sp>
       <p:sp>
         <p:nvSpPr>
-          <p:cNvPr id="201" name=""/>
+          <p:cNvPr id="211" name=""/>
           <p:cNvSpPr txBox="1"/>
           <p:nvPr/>
         </p:nvSpPr>
@@ -2622,7 +2668,7 @@
       </p:grpSpPr>
       <p:sp>
         <p:nvSpPr>
-          <p:cNvPr id="202" name=""/>
+          <p:cNvPr id="212" name=""/>
           <p:cNvSpPr/>
           <p:nvPr/>
         </p:nvSpPr>
@@ -2680,7 +2726,7 @@
       </p:sp>
       <p:sp>
         <p:nvSpPr>
-          <p:cNvPr id="203" name=""/>
+          <p:cNvPr id="213" name=""/>
           <p:cNvSpPr/>
           <p:nvPr/>
         </p:nvSpPr>
@@ -2738,7 +2784,7 @@
       </p:sp>
       <p:sp>
         <p:nvSpPr>
-          <p:cNvPr id="204" name=""/>
+          <p:cNvPr id="214" name=""/>
           <p:cNvSpPr/>
           <p:nvPr/>
         </p:nvSpPr>
@@ -2796,7 +2842,7 @@
       </p:sp>
       <p:sp>
         <p:nvSpPr>
-          <p:cNvPr id="205" name=""/>
+          <p:cNvPr id="215" name=""/>
           <p:cNvSpPr/>
           <p:nvPr/>
         </p:nvSpPr>
@@ -3012,9 +3058,32 @@
           </a:p>
         </p:txBody>
       </p:sp>
+      <p:pic>
+        <p:nvPicPr>
+          <p:cNvPr id="216" name="" descr=""/>
+          <p:cNvPicPr/>
+          <p:nvPr/>
+        </p:nvPicPr>
+        <p:blipFill>
+          <a:blip r:embed="rId1"/>
+          <a:stretch/>
+        </p:blipFill>
+        <p:spPr>
+          <a:xfrm>
+            <a:off x="10515600" y="38160"/>
+            <a:ext cx="1142640" cy="1142640"/>
+          </a:xfrm>
+          <a:prstGeom prst="rect">
+            <a:avLst/>
+          </a:prstGeom>
+          <a:ln w="0">
+            <a:noFill/>
+          </a:ln>
+        </p:spPr>
+      </p:pic>
       <p:sp>
         <p:nvSpPr>
-          <p:cNvPr id="206" name=""/>
+          <p:cNvPr id="217" name=""/>
           <p:cNvSpPr/>
           <p:nvPr/>
         </p:nvSpPr>
@@ -3220,7 +3289,7 @@
       </p:sp>
       <p:sp>
         <p:nvSpPr>
-          <p:cNvPr id="207" name=""/>
+          <p:cNvPr id="218" name=""/>
           <p:cNvSpPr txBox="1"/>
           <p:nvPr/>
         </p:nvSpPr>
@@ -3283,7 +3352,7 @@
       </p:sp>
       <p:sp>
         <p:nvSpPr>
-          <p:cNvPr id="208" name=""/>
+          <p:cNvPr id="219" name=""/>
           <p:cNvSpPr/>
           <p:nvPr/>
         </p:nvSpPr>
@@ -3490,7 +3559,7 @@
       </p:sp>
       <p:sp>
         <p:nvSpPr>
-          <p:cNvPr id="209" name=""/>
+          <p:cNvPr id="220" name=""/>
           <p:cNvSpPr txBox="1"/>
           <p:nvPr/>
         </p:nvSpPr>
@@ -3533,7 +3602,7 @@
       </p:sp>
       <p:sp>
         <p:nvSpPr>
-          <p:cNvPr id="210" name=""/>
+          <p:cNvPr id="221" name=""/>
           <p:cNvSpPr/>
           <p:nvPr/>
         </p:nvSpPr>
@@ -3739,7 +3808,7 @@
       </p:sp>
       <p:sp>
         <p:nvSpPr>
-          <p:cNvPr id="211" name=""/>
+          <p:cNvPr id="222" name=""/>
           <p:cNvSpPr txBox="1"/>
           <p:nvPr/>
         </p:nvSpPr>
@@ -3782,7 +3851,7 @@
       </p:sp>
       <p:sp>
         <p:nvSpPr>
-          <p:cNvPr id="212" name=""/>
+          <p:cNvPr id="223" name=""/>
           <p:cNvSpPr/>
           <p:nvPr/>
         </p:nvSpPr>
@@ -3989,7 +4058,7 @@
       </p:sp>
       <p:sp>
         <p:nvSpPr>
-          <p:cNvPr id="213" name=""/>
+          <p:cNvPr id="224" name=""/>
           <p:cNvSpPr txBox="1"/>
           <p:nvPr/>
         </p:nvSpPr>
@@ -4032,7 +4101,7 @@
       </p:sp>
       <p:sp>
         <p:nvSpPr>
-          <p:cNvPr id="214" name=""/>
+          <p:cNvPr id="225" name=""/>
           <p:cNvSpPr/>
           <p:nvPr/>
         </p:nvSpPr>
@@ -4239,7 +4308,7 @@
       </p:sp>
       <p:sp>
         <p:nvSpPr>
-          <p:cNvPr id="215" name=""/>
+          <p:cNvPr id="226" name=""/>
           <p:cNvSpPr txBox="1"/>
           <p:nvPr/>
         </p:nvSpPr>
@@ -4282,12 +4351,12 @@
       </p:sp>
       <p:pic>
         <p:nvPicPr>
-          <p:cNvPr id="216" name="" descr=""/>
+          <p:cNvPr id="227" name="" descr=""/>
           <p:cNvPicPr/>
           <p:nvPr/>
         </p:nvPicPr>
         <p:blipFill>
-          <a:blip r:embed="rId1"/>
+          <a:blip r:embed="rId2"/>
           <a:stretch/>
         </p:blipFill>
         <p:spPr>
@@ -4305,7 +4374,7 @@
       </p:pic>
       <p:sp>
         <p:nvSpPr>
-          <p:cNvPr id="217" name=""/>
+          <p:cNvPr id="228" name=""/>
           <p:cNvSpPr txBox="1"/>
           <p:nvPr/>
         </p:nvSpPr>
@@ -4348,7 +4417,7 @@
       </p:sp>
       <p:sp>
         <p:nvSpPr>
-          <p:cNvPr id="218" name=""/>
+          <p:cNvPr id="229" name=""/>
           <p:cNvSpPr txBox="1"/>
           <p:nvPr/>
         </p:nvSpPr>
@@ -4391,7 +4460,7 @@
       </p:sp>
       <p:sp>
         <p:nvSpPr>
-          <p:cNvPr id="219" name=""/>
+          <p:cNvPr id="230" name=""/>
           <p:cNvSpPr/>
           <p:nvPr/>
         </p:nvSpPr>
@@ -4529,7 +4598,7 @@
       </p:sp>
       <p:sp>
         <p:nvSpPr>
-          <p:cNvPr id="220" name=""/>
+          <p:cNvPr id="231" name=""/>
           <p:cNvSpPr txBox="1"/>
           <p:nvPr/>
         </p:nvSpPr>
@@ -4582,7 +4651,7 @@
       </p:sp>
       <p:sp>
         <p:nvSpPr>
-          <p:cNvPr id="221" name=""/>
+          <p:cNvPr id="232" name=""/>
           <p:cNvSpPr txBox="1"/>
           <p:nvPr/>
         </p:nvSpPr>
@@ -4655,7 +4724,7 @@
       </p:grpSpPr>
       <p:sp>
         <p:nvSpPr>
-          <p:cNvPr id="222" name=""/>
+          <p:cNvPr id="233" name=""/>
           <p:cNvSpPr/>
           <p:nvPr/>
         </p:nvSpPr>
@@ -4713,7 +4782,7 @@
       </p:sp>
       <p:sp>
         <p:nvSpPr>
-          <p:cNvPr id="223" name=""/>
+          <p:cNvPr id="234" name=""/>
           <p:cNvSpPr/>
           <p:nvPr/>
         </p:nvSpPr>
@@ -4771,7 +4840,7 @@
       </p:sp>
       <p:sp>
         <p:nvSpPr>
-          <p:cNvPr id="224" name=""/>
+          <p:cNvPr id="235" name=""/>
           <p:cNvSpPr/>
           <p:nvPr/>
         </p:nvSpPr>
@@ -4829,7 +4898,7 @@
       </p:sp>
       <p:sp>
         <p:nvSpPr>
-          <p:cNvPr id="225" name=""/>
+          <p:cNvPr id="236" name=""/>
           <p:cNvSpPr/>
           <p:nvPr/>
         </p:nvSpPr>
@@ -5045,9 +5114,32 @@
           </a:p>
         </p:txBody>
       </p:sp>
+      <p:pic>
+        <p:nvPicPr>
+          <p:cNvPr id="237" name="" descr=""/>
+          <p:cNvPicPr/>
+          <p:nvPr/>
+        </p:nvPicPr>
+        <p:blipFill>
+          <a:blip r:embed="rId1"/>
+          <a:stretch/>
+        </p:blipFill>
+        <p:spPr>
+          <a:xfrm>
+            <a:off x="10515600" y="38160"/>
+            <a:ext cx="1142640" cy="1142640"/>
+          </a:xfrm>
+          <a:prstGeom prst="rect">
+            <a:avLst/>
+          </a:prstGeom>
+          <a:ln w="0">
+            <a:noFill/>
+          </a:ln>
+        </p:spPr>
+      </p:pic>
       <p:sp>
         <p:nvSpPr>
-          <p:cNvPr id="226" name=""/>
+          <p:cNvPr id="238" name=""/>
           <p:cNvSpPr/>
           <p:nvPr/>
         </p:nvSpPr>
@@ -5253,7 +5345,7 @@
       </p:sp>
       <p:sp>
         <p:nvSpPr>
-          <p:cNvPr id="227" name=""/>
+          <p:cNvPr id="239" name=""/>
           <p:cNvSpPr txBox="1"/>
           <p:nvPr/>
         </p:nvSpPr>
@@ -5296,7 +5388,7 @@
       </p:sp>
       <p:sp>
         <p:nvSpPr>
-          <p:cNvPr id="228" name=""/>
+          <p:cNvPr id="240" name=""/>
           <p:cNvSpPr/>
           <p:nvPr/>
         </p:nvSpPr>
@@ -5503,7 +5595,7 @@
       </p:sp>
       <p:sp>
         <p:nvSpPr>
-          <p:cNvPr id="229" name=""/>
+          <p:cNvPr id="241" name=""/>
           <p:cNvSpPr txBox="1"/>
           <p:nvPr/>
         </p:nvSpPr>
@@ -5556,7 +5648,7 @@
       </p:sp>
       <p:sp>
         <p:nvSpPr>
-          <p:cNvPr id="230" name=""/>
+          <p:cNvPr id="242" name=""/>
           <p:cNvSpPr/>
           <p:nvPr/>
         </p:nvSpPr>
@@ -5762,7 +5854,7 @@
       </p:sp>
       <p:sp>
         <p:nvSpPr>
-          <p:cNvPr id="231" name=""/>
+          <p:cNvPr id="243" name=""/>
           <p:cNvSpPr txBox="1"/>
           <p:nvPr/>
         </p:nvSpPr>
@@ -5825,7 +5917,7 @@
       </p:sp>
       <p:sp>
         <p:nvSpPr>
-          <p:cNvPr id="232" name=""/>
+          <p:cNvPr id="244" name=""/>
           <p:cNvSpPr/>
           <p:nvPr/>
         </p:nvSpPr>
@@ -6032,7 +6124,7 @@
       </p:sp>
       <p:sp>
         <p:nvSpPr>
-          <p:cNvPr id="233" name=""/>
+          <p:cNvPr id="245" name=""/>
           <p:cNvSpPr txBox="1"/>
           <p:nvPr/>
         </p:nvSpPr>
@@ -6085,7 +6177,7 @@
       </p:sp>
       <p:sp>
         <p:nvSpPr>
-          <p:cNvPr id="234" name=""/>
+          <p:cNvPr id="246" name=""/>
           <p:cNvSpPr txBox="1"/>
           <p:nvPr/>
         </p:nvSpPr>
@@ -6128,7 +6220,7 @@
       </p:sp>
       <p:sp>
         <p:nvSpPr>
-          <p:cNvPr id="235" name=""/>
+          <p:cNvPr id="247" name=""/>
           <p:cNvSpPr/>
           <p:nvPr/>
         </p:nvSpPr>
@@ -6334,7 +6426,7 @@
       </p:sp>
       <p:sp>
         <p:nvSpPr>
-          <p:cNvPr id="236" name=""/>
+          <p:cNvPr id="248" name=""/>
           <p:cNvSpPr txBox="1"/>
           <p:nvPr/>
         </p:nvSpPr>
@@ -6377,7 +6469,7 @@
       </p:sp>
       <p:sp>
         <p:nvSpPr>
-          <p:cNvPr id="237" name=""/>
+          <p:cNvPr id="249" name=""/>
           <p:cNvSpPr/>
           <p:nvPr/>
         </p:nvSpPr>
@@ -6584,7 +6676,7 @@
       </p:sp>
       <p:sp>
         <p:nvSpPr>
-          <p:cNvPr id="238" name=""/>
+          <p:cNvPr id="250" name=""/>
           <p:cNvSpPr txBox="1"/>
           <p:nvPr/>
         </p:nvSpPr>
@@ -6627,7 +6719,7 @@
       </p:sp>
       <p:sp>
         <p:nvSpPr>
-          <p:cNvPr id="239" name=""/>
+          <p:cNvPr id="251" name=""/>
           <p:cNvSpPr txBox="1"/>
           <p:nvPr/>
         </p:nvSpPr>
@@ -6670,7 +6762,7 @@
       </p:sp>
       <p:sp>
         <p:nvSpPr>
-          <p:cNvPr id="240" name=""/>
+          <p:cNvPr id="252" name=""/>
           <p:cNvSpPr txBox="1"/>
           <p:nvPr/>
         </p:nvSpPr>
@@ -6733,7 +6825,7 @@
       </p:sp>
       <p:sp>
         <p:nvSpPr>
-          <p:cNvPr id="241" name=""/>
+          <p:cNvPr id="253" name=""/>
           <p:cNvSpPr/>
           <p:nvPr/>
         </p:nvSpPr>
@@ -6871,7 +6963,7 @@
       </p:sp>
       <p:sp>
         <p:nvSpPr>
-          <p:cNvPr id="242" name=""/>
+          <p:cNvPr id="254" name=""/>
           <p:cNvSpPr txBox="1"/>
           <p:nvPr/>
         </p:nvSpPr>
@@ -6924,7 +7016,7 @@
       </p:sp>
       <p:sp>
         <p:nvSpPr>
-          <p:cNvPr id="243" name=""/>
+          <p:cNvPr id="255" name=""/>
           <p:cNvSpPr txBox="1"/>
           <p:nvPr/>
         </p:nvSpPr>
@@ -6997,7 +7089,7 @@
       </p:grpSpPr>
       <p:sp>
         <p:nvSpPr>
-          <p:cNvPr id="13" name=""/>
+          <p:cNvPr id="14" name=""/>
           <p:cNvSpPr/>
           <p:nvPr/>
         </p:nvSpPr>
@@ -7055,7 +7147,7 @@
       </p:sp>
       <p:sp>
         <p:nvSpPr>
-          <p:cNvPr id="14" name=""/>
+          <p:cNvPr id="15" name=""/>
           <p:cNvSpPr/>
           <p:nvPr/>
         </p:nvSpPr>
@@ -7113,7 +7205,7 @@
       </p:sp>
       <p:sp>
         <p:nvSpPr>
-          <p:cNvPr id="15" name=""/>
+          <p:cNvPr id="16" name=""/>
           <p:cNvSpPr/>
           <p:nvPr/>
         </p:nvSpPr>
@@ -7171,7 +7263,7 @@
       </p:sp>
       <p:sp>
         <p:nvSpPr>
-          <p:cNvPr id="16" name=""/>
+          <p:cNvPr id="17" name=""/>
           <p:cNvSpPr txBox="1"/>
           <p:nvPr/>
         </p:nvSpPr>
@@ -7244,7 +7336,7 @@
       </p:sp>
       <p:sp>
         <p:nvSpPr>
-          <p:cNvPr id="17" name=""/>
+          <p:cNvPr id="18" name=""/>
           <p:cNvSpPr txBox="1"/>
           <p:nvPr/>
         </p:nvSpPr>
@@ -7297,7 +7389,7 @@
       </p:sp>
       <p:sp>
         <p:nvSpPr>
-          <p:cNvPr id="18" name=""/>
+          <p:cNvPr id="19" name=""/>
           <p:cNvSpPr txBox="1"/>
           <p:nvPr/>
         </p:nvSpPr>
@@ -7350,7 +7442,7 @@
       </p:sp>
       <p:sp>
         <p:nvSpPr>
-          <p:cNvPr id="19" name=""/>
+          <p:cNvPr id="20" name=""/>
           <p:cNvSpPr txBox="1"/>
           <p:nvPr/>
         </p:nvSpPr>
@@ -7403,7 +7495,7 @@
       </p:sp>
       <p:sp>
         <p:nvSpPr>
-          <p:cNvPr id="20" name=""/>
+          <p:cNvPr id="21" name=""/>
           <p:cNvSpPr txBox="1"/>
           <p:nvPr/>
         </p:nvSpPr>
@@ -7456,7 +7548,7 @@
       </p:sp>
       <p:sp>
         <p:nvSpPr>
-          <p:cNvPr id="21" name=""/>
+          <p:cNvPr id="22" name=""/>
           <p:cNvSpPr txBox="1"/>
           <p:nvPr/>
         </p:nvSpPr>
@@ -7509,7 +7601,7 @@
       </p:sp>
       <p:sp>
         <p:nvSpPr>
-          <p:cNvPr id="22" name=""/>
+          <p:cNvPr id="23" name=""/>
           <p:cNvSpPr/>
           <p:nvPr/>
         </p:nvSpPr>
@@ -7565,9 +7657,32 @@
           </a:p>
         </p:txBody>
       </p:sp>
+      <p:pic>
+        <p:nvPicPr>
+          <p:cNvPr id="24" name="" descr=""/>
+          <p:cNvPicPr/>
+          <p:nvPr/>
+        </p:nvPicPr>
+        <p:blipFill>
+          <a:blip r:embed="rId1"/>
+          <a:stretch/>
+        </p:blipFill>
+        <p:spPr>
+          <a:xfrm>
+            <a:off x="10744200" y="-219240"/>
+            <a:ext cx="1256760" cy="1256760"/>
+          </a:xfrm>
+          <a:prstGeom prst="rect">
+            <a:avLst/>
+          </a:prstGeom>
+          <a:ln w="0">
+            <a:noFill/>
+          </a:ln>
+        </p:spPr>
+      </p:pic>
       <p:sp>
         <p:nvSpPr>
-          <p:cNvPr id="23" name=""/>
+          <p:cNvPr id="25" name=""/>
           <p:cNvSpPr/>
           <p:nvPr/>
         </p:nvSpPr>
@@ -7625,7 +7740,7 @@
       </p:sp>
       <p:sp>
         <p:nvSpPr>
-          <p:cNvPr id="24" name=""/>
+          <p:cNvPr id="26" name=""/>
           <p:cNvSpPr/>
           <p:nvPr/>
         </p:nvSpPr>
@@ -7683,7 +7798,7 @@
       </p:sp>
       <p:sp>
         <p:nvSpPr>
-          <p:cNvPr id="25" name=""/>
+          <p:cNvPr id="27" name=""/>
           <p:cNvSpPr/>
           <p:nvPr/>
         </p:nvSpPr>
@@ -7741,7 +7856,7 @@
       </p:sp>
       <p:sp>
         <p:nvSpPr>
-          <p:cNvPr id="26" name=""/>
+          <p:cNvPr id="28" name=""/>
           <p:cNvSpPr/>
           <p:nvPr/>
         </p:nvSpPr>
@@ -7799,7 +7914,7 @@
       </p:sp>
       <p:sp>
         <p:nvSpPr>
-          <p:cNvPr id="27" name=""/>
+          <p:cNvPr id="29" name=""/>
           <p:cNvSpPr/>
           <p:nvPr/>
         </p:nvSpPr>
@@ -7857,7 +7972,7 @@
       </p:sp>
       <p:sp>
         <p:nvSpPr>
-          <p:cNvPr id="28" name=""/>
+          <p:cNvPr id="30" name=""/>
           <p:cNvSpPr/>
           <p:nvPr/>
         </p:nvSpPr>
@@ -7915,7 +8030,7 @@
       </p:sp>
       <p:sp>
         <p:nvSpPr>
-          <p:cNvPr id="29" name=""/>
+          <p:cNvPr id="31" name=""/>
           <p:cNvSpPr txBox="1"/>
           <p:nvPr/>
         </p:nvSpPr>
@@ -7958,7 +8073,7 @@
       </p:sp>
       <p:sp>
         <p:nvSpPr>
-          <p:cNvPr id="30" name=""/>
+          <p:cNvPr id="32" name=""/>
           <p:cNvSpPr txBox="1"/>
           <p:nvPr/>
         </p:nvSpPr>
@@ -8031,7 +8146,7 @@
       </p:grpSpPr>
       <p:sp>
         <p:nvSpPr>
-          <p:cNvPr id="31" name=""/>
+          <p:cNvPr id="33" name=""/>
           <p:cNvSpPr/>
           <p:nvPr/>
         </p:nvSpPr>
@@ -8089,7 +8204,7 @@
       </p:sp>
       <p:sp>
         <p:nvSpPr>
-          <p:cNvPr id="32" name=""/>
+          <p:cNvPr id="34" name=""/>
           <p:cNvSpPr/>
           <p:nvPr/>
         </p:nvSpPr>
@@ -8147,7 +8262,7 @@
       </p:sp>
       <p:sp>
         <p:nvSpPr>
-          <p:cNvPr id="33" name=""/>
+          <p:cNvPr id="35" name=""/>
           <p:cNvSpPr/>
           <p:nvPr/>
         </p:nvSpPr>
@@ -8205,7 +8320,7 @@
       </p:sp>
       <p:sp>
         <p:nvSpPr>
-          <p:cNvPr id="34" name=""/>
+          <p:cNvPr id="36" name=""/>
           <p:cNvSpPr/>
           <p:nvPr/>
         </p:nvSpPr>
@@ -8421,9 +8536,32 @@
           </a:p>
         </p:txBody>
       </p:sp>
+      <p:pic>
+        <p:nvPicPr>
+          <p:cNvPr id="37" name="" descr=""/>
+          <p:cNvPicPr/>
+          <p:nvPr/>
+        </p:nvPicPr>
+        <p:blipFill>
+          <a:blip r:embed="rId1"/>
+          <a:stretch/>
+        </p:blipFill>
+        <p:spPr>
+          <a:xfrm>
+            <a:off x="10515600" y="38160"/>
+            <a:ext cx="1142640" cy="1142640"/>
+          </a:xfrm>
+          <a:prstGeom prst="rect">
+            <a:avLst/>
+          </a:prstGeom>
+          <a:ln w="0">
+            <a:noFill/>
+          </a:ln>
+        </p:spPr>
+      </p:pic>
       <p:sp>
         <p:nvSpPr>
-          <p:cNvPr id="35" name=""/>
+          <p:cNvPr id="38" name=""/>
           <p:cNvSpPr/>
           <p:nvPr/>
         </p:nvSpPr>
@@ -8629,7 +8767,7 @@
       </p:sp>
       <p:sp>
         <p:nvSpPr>
-          <p:cNvPr id="36" name=""/>
+          <p:cNvPr id="39" name=""/>
           <p:cNvSpPr txBox="1"/>
           <p:nvPr/>
         </p:nvSpPr>
@@ -8692,7 +8830,7 @@
       </p:sp>
       <p:sp>
         <p:nvSpPr>
-          <p:cNvPr id="37" name=""/>
+          <p:cNvPr id="40" name=""/>
           <p:cNvSpPr/>
           <p:nvPr/>
         </p:nvSpPr>
@@ -8899,7 +9037,7 @@
       </p:sp>
       <p:sp>
         <p:nvSpPr>
-          <p:cNvPr id="38" name=""/>
+          <p:cNvPr id="41" name=""/>
           <p:cNvSpPr txBox="1"/>
           <p:nvPr/>
         </p:nvSpPr>
@@ -8942,7 +9080,7 @@
       </p:sp>
       <p:sp>
         <p:nvSpPr>
-          <p:cNvPr id="39" name=""/>
+          <p:cNvPr id="42" name=""/>
           <p:cNvSpPr/>
           <p:nvPr/>
         </p:nvSpPr>
@@ -9149,7 +9287,7 @@
       </p:sp>
       <p:sp>
         <p:nvSpPr>
-          <p:cNvPr id="40" name=""/>
+          <p:cNvPr id="43" name=""/>
           <p:cNvSpPr txBox="1"/>
           <p:nvPr/>
         </p:nvSpPr>
@@ -9192,7 +9330,7 @@
       </p:sp>
       <p:sp>
         <p:nvSpPr>
-          <p:cNvPr id="41" name=""/>
+          <p:cNvPr id="44" name=""/>
           <p:cNvSpPr txBox="1"/>
           <p:nvPr/>
         </p:nvSpPr>
@@ -9295,7 +9433,7 @@
       </p:sp>
       <p:sp>
         <p:nvSpPr>
-          <p:cNvPr id="42" name=""/>
+          <p:cNvPr id="45" name=""/>
           <p:cNvSpPr/>
           <p:nvPr/>
         </p:nvSpPr>
@@ -9501,7 +9639,7 @@
       </p:sp>
       <p:sp>
         <p:nvSpPr>
-          <p:cNvPr id="43" name=""/>
+          <p:cNvPr id="46" name=""/>
           <p:cNvSpPr txBox="1"/>
           <p:nvPr/>
         </p:nvSpPr>
@@ -9554,7 +9692,7 @@
       </p:sp>
       <p:sp>
         <p:nvSpPr>
-          <p:cNvPr id="44" name=""/>
+          <p:cNvPr id="47" name=""/>
           <p:cNvSpPr/>
           <p:nvPr/>
         </p:nvSpPr>
@@ -9761,7 +9899,7 @@
       </p:sp>
       <p:sp>
         <p:nvSpPr>
-          <p:cNvPr id="45" name=""/>
+          <p:cNvPr id="48" name=""/>
           <p:cNvSpPr txBox="1"/>
           <p:nvPr/>
         </p:nvSpPr>
@@ -9814,7 +9952,7 @@
       </p:sp>
       <p:sp>
         <p:nvSpPr>
-          <p:cNvPr id="46" name=""/>
+          <p:cNvPr id="49" name=""/>
           <p:cNvSpPr/>
           <p:nvPr/>
         </p:nvSpPr>
@@ -10021,7 +10159,7 @@
       </p:sp>
       <p:sp>
         <p:nvSpPr>
-          <p:cNvPr id="47" name=""/>
+          <p:cNvPr id="50" name=""/>
           <p:cNvSpPr txBox="1"/>
           <p:nvPr/>
         </p:nvSpPr>
@@ -10064,7 +10202,7 @@
       </p:sp>
       <p:sp>
         <p:nvSpPr>
-          <p:cNvPr id="48" name=""/>
+          <p:cNvPr id="51" name=""/>
           <p:cNvSpPr txBox="1"/>
           <p:nvPr/>
         </p:nvSpPr>
@@ -10107,7 +10245,7 @@
       </p:sp>
       <p:sp>
         <p:nvSpPr>
-          <p:cNvPr id="49" name=""/>
+          <p:cNvPr id="52" name=""/>
           <p:cNvSpPr txBox="1"/>
           <p:nvPr/>
         </p:nvSpPr>
@@ -10160,7 +10298,7 @@
       </p:sp>
       <p:sp>
         <p:nvSpPr>
-          <p:cNvPr id="50" name=""/>
+          <p:cNvPr id="53" name=""/>
           <p:cNvSpPr/>
           <p:nvPr/>
         </p:nvSpPr>
@@ -10298,7 +10436,7 @@
       </p:sp>
       <p:sp>
         <p:nvSpPr>
-          <p:cNvPr id="51" name=""/>
+          <p:cNvPr id="54" name=""/>
           <p:cNvSpPr txBox="1"/>
           <p:nvPr/>
         </p:nvSpPr>
@@ -10371,7 +10509,7 @@
       </p:sp>
       <p:sp>
         <p:nvSpPr>
-          <p:cNvPr id="52" name=""/>
+          <p:cNvPr id="55" name=""/>
           <p:cNvSpPr txBox="1"/>
           <p:nvPr/>
         </p:nvSpPr>
@@ -10444,7 +10582,7 @@
       </p:grpSpPr>
       <p:sp>
         <p:nvSpPr>
-          <p:cNvPr id="53" name=""/>
+          <p:cNvPr id="56" name=""/>
           <p:cNvSpPr/>
           <p:nvPr/>
         </p:nvSpPr>
@@ -10502,7 +10640,7 @@
       </p:sp>
       <p:sp>
         <p:nvSpPr>
-          <p:cNvPr id="54" name=""/>
+          <p:cNvPr id="57" name=""/>
           <p:cNvSpPr/>
           <p:nvPr/>
         </p:nvSpPr>
@@ -10560,7 +10698,7 @@
       </p:sp>
       <p:sp>
         <p:nvSpPr>
-          <p:cNvPr id="55" name=""/>
+          <p:cNvPr id="58" name=""/>
           <p:cNvSpPr/>
           <p:nvPr/>
         </p:nvSpPr>
@@ -10618,7 +10756,7 @@
       </p:sp>
       <p:sp>
         <p:nvSpPr>
-          <p:cNvPr id="56" name=""/>
+          <p:cNvPr id="59" name=""/>
           <p:cNvSpPr/>
           <p:nvPr/>
         </p:nvSpPr>
@@ -10834,9 +10972,32 @@
           </a:p>
         </p:txBody>
       </p:sp>
+      <p:pic>
+        <p:nvPicPr>
+          <p:cNvPr id="60" name="" descr=""/>
+          <p:cNvPicPr/>
+          <p:nvPr/>
+        </p:nvPicPr>
+        <p:blipFill>
+          <a:blip r:embed="rId1"/>
+          <a:stretch/>
+        </p:blipFill>
+        <p:spPr>
+          <a:xfrm>
+            <a:off x="10515600" y="38160"/>
+            <a:ext cx="1142640" cy="1142640"/>
+          </a:xfrm>
+          <a:prstGeom prst="rect">
+            <a:avLst/>
+          </a:prstGeom>
+          <a:ln w="0">
+            <a:noFill/>
+          </a:ln>
+        </p:spPr>
+      </p:pic>
       <p:sp>
         <p:nvSpPr>
-          <p:cNvPr id="57" name=""/>
+          <p:cNvPr id="61" name=""/>
           <p:cNvSpPr/>
           <p:nvPr/>
         </p:nvSpPr>
@@ -11042,7 +11203,7 @@
       </p:sp>
       <p:sp>
         <p:nvSpPr>
-          <p:cNvPr id="58" name=""/>
+          <p:cNvPr id="62" name=""/>
           <p:cNvSpPr txBox="1"/>
           <p:nvPr/>
         </p:nvSpPr>
@@ -11115,7 +11276,7 @@
       </p:sp>
       <p:sp>
         <p:nvSpPr>
-          <p:cNvPr id="59" name=""/>
+          <p:cNvPr id="63" name=""/>
           <p:cNvSpPr/>
           <p:nvPr/>
         </p:nvSpPr>
@@ -11322,7 +11483,7 @@
       </p:sp>
       <p:sp>
         <p:nvSpPr>
-          <p:cNvPr id="60" name=""/>
+          <p:cNvPr id="64" name=""/>
           <p:cNvSpPr txBox="1"/>
           <p:nvPr/>
         </p:nvSpPr>
@@ -11365,7 +11526,7 @@
       </p:sp>
       <p:sp>
         <p:nvSpPr>
-          <p:cNvPr id="61" name=""/>
+          <p:cNvPr id="65" name=""/>
           <p:cNvSpPr/>
           <p:nvPr/>
         </p:nvSpPr>
@@ -11572,7 +11733,7 @@
       </p:sp>
       <p:sp>
         <p:nvSpPr>
-          <p:cNvPr id="62" name=""/>
+          <p:cNvPr id="66" name=""/>
           <p:cNvSpPr txBox="1"/>
           <p:nvPr/>
         </p:nvSpPr>
@@ -11615,7 +11776,7 @@
       </p:sp>
       <p:sp>
         <p:nvSpPr>
-          <p:cNvPr id="63" name=""/>
+          <p:cNvPr id="67" name=""/>
           <p:cNvSpPr/>
           <p:nvPr/>
         </p:nvSpPr>
@@ -11821,7 +11982,7 @@
       </p:sp>
       <p:sp>
         <p:nvSpPr>
-          <p:cNvPr id="64" name=""/>
+          <p:cNvPr id="68" name=""/>
           <p:cNvSpPr txBox="1"/>
           <p:nvPr/>
         </p:nvSpPr>
@@ -11864,7 +12025,7 @@
       </p:sp>
       <p:sp>
         <p:nvSpPr>
-          <p:cNvPr id="65" name=""/>
+          <p:cNvPr id="69" name=""/>
           <p:cNvSpPr/>
           <p:nvPr/>
         </p:nvSpPr>
@@ -12071,7 +12232,7 @@
       </p:sp>
       <p:sp>
         <p:nvSpPr>
-          <p:cNvPr id="66" name=""/>
+          <p:cNvPr id="70" name=""/>
           <p:cNvSpPr txBox="1"/>
           <p:nvPr/>
         </p:nvSpPr>
@@ -12124,7 +12285,7 @@
       </p:sp>
       <p:sp>
         <p:nvSpPr>
-          <p:cNvPr id="67" name=""/>
+          <p:cNvPr id="71" name=""/>
           <p:cNvSpPr/>
           <p:nvPr/>
         </p:nvSpPr>
@@ -12331,7 +12492,7 @@
       </p:sp>
       <p:sp>
         <p:nvSpPr>
-          <p:cNvPr id="68" name=""/>
+          <p:cNvPr id="72" name=""/>
           <p:cNvSpPr txBox="1"/>
           <p:nvPr/>
         </p:nvSpPr>
@@ -12394,7 +12555,7 @@
       </p:sp>
       <p:sp>
         <p:nvSpPr>
-          <p:cNvPr id="69" name=""/>
+          <p:cNvPr id="73" name=""/>
           <p:cNvSpPr txBox="1"/>
           <p:nvPr/>
         </p:nvSpPr>
@@ -12457,7 +12618,7 @@
       </p:sp>
       <p:sp>
         <p:nvSpPr>
-          <p:cNvPr id="70" name=""/>
+          <p:cNvPr id="74" name=""/>
           <p:cNvSpPr txBox="1"/>
           <p:nvPr/>
         </p:nvSpPr>
@@ -12500,7 +12661,7 @@
       </p:sp>
       <p:sp>
         <p:nvSpPr>
-          <p:cNvPr id="71" name=""/>
+          <p:cNvPr id="75" name=""/>
           <p:cNvSpPr/>
           <p:nvPr/>
         </p:nvSpPr>
@@ -12638,7 +12799,7 @@
       </p:sp>
       <p:sp>
         <p:nvSpPr>
-          <p:cNvPr id="72" name=""/>
+          <p:cNvPr id="76" name=""/>
           <p:cNvSpPr txBox="1"/>
           <p:nvPr/>
         </p:nvSpPr>
@@ -12691,7 +12852,7 @@
       </p:sp>
       <p:sp>
         <p:nvSpPr>
-          <p:cNvPr id="73" name=""/>
+          <p:cNvPr id="77" name=""/>
           <p:cNvSpPr txBox="1"/>
           <p:nvPr/>
         </p:nvSpPr>
@@ -12764,7 +12925,7 @@
       </p:grpSpPr>
       <p:sp>
         <p:nvSpPr>
-          <p:cNvPr id="74" name=""/>
+          <p:cNvPr id="78" name=""/>
           <p:cNvSpPr/>
           <p:nvPr/>
         </p:nvSpPr>
@@ -12822,7 +12983,7 @@
       </p:sp>
       <p:sp>
         <p:nvSpPr>
-          <p:cNvPr id="75" name=""/>
+          <p:cNvPr id="79" name=""/>
           <p:cNvSpPr/>
           <p:nvPr/>
         </p:nvSpPr>
@@ -12880,7 +13041,7 @@
       </p:sp>
       <p:sp>
         <p:nvSpPr>
-          <p:cNvPr id="76" name=""/>
+          <p:cNvPr id="80" name=""/>
           <p:cNvSpPr/>
           <p:nvPr/>
         </p:nvSpPr>
@@ -12938,7 +13099,7 @@
       </p:sp>
       <p:sp>
         <p:nvSpPr>
-          <p:cNvPr id="77" name=""/>
+          <p:cNvPr id="81" name=""/>
           <p:cNvSpPr/>
           <p:nvPr/>
         </p:nvSpPr>
@@ -13154,9 +13315,32 @@
           </a:p>
         </p:txBody>
       </p:sp>
+      <p:pic>
+        <p:nvPicPr>
+          <p:cNvPr id="82" name="" descr=""/>
+          <p:cNvPicPr/>
+          <p:nvPr/>
+        </p:nvPicPr>
+        <p:blipFill>
+          <a:blip r:embed="rId1"/>
+          <a:stretch/>
+        </p:blipFill>
+        <p:spPr>
+          <a:xfrm>
+            <a:off x="10515600" y="38160"/>
+            <a:ext cx="1142640" cy="1142640"/>
+          </a:xfrm>
+          <a:prstGeom prst="rect">
+            <a:avLst/>
+          </a:prstGeom>
+          <a:ln w="0">
+            <a:noFill/>
+          </a:ln>
+        </p:spPr>
+      </p:pic>
       <p:sp>
         <p:nvSpPr>
-          <p:cNvPr id="78" name=""/>
+          <p:cNvPr id="83" name=""/>
           <p:cNvSpPr txBox="1"/>
           <p:nvPr/>
         </p:nvSpPr>
@@ -13229,7 +13413,7 @@
       </p:sp>
       <p:sp>
         <p:nvSpPr>
-          <p:cNvPr id="79" name=""/>
+          <p:cNvPr id="84" name=""/>
           <p:cNvSpPr/>
           <p:nvPr/>
         </p:nvSpPr>
@@ -13435,7 +13619,7 @@
       </p:sp>
       <p:sp>
         <p:nvSpPr>
-          <p:cNvPr id="80" name=""/>
+          <p:cNvPr id="85" name=""/>
           <p:cNvSpPr txBox="1"/>
           <p:nvPr/>
         </p:nvSpPr>
@@ -13538,7 +13722,7 @@
       </p:sp>
       <p:sp>
         <p:nvSpPr>
-          <p:cNvPr id="81" name=""/>
+          <p:cNvPr id="86" name=""/>
           <p:cNvSpPr/>
           <p:nvPr/>
         </p:nvSpPr>
@@ -13745,7 +13929,7 @@
       </p:sp>
       <p:sp>
         <p:nvSpPr>
-          <p:cNvPr id="82" name=""/>
+          <p:cNvPr id="87" name=""/>
           <p:cNvSpPr txBox="1"/>
           <p:nvPr/>
         </p:nvSpPr>
@@ -13798,7 +13982,7 @@
       </p:sp>
       <p:sp>
         <p:nvSpPr>
-          <p:cNvPr id="83" name=""/>
+          <p:cNvPr id="88" name=""/>
           <p:cNvSpPr/>
           <p:nvPr/>
         </p:nvSpPr>
@@ -14004,7 +14188,7 @@
       </p:sp>
       <p:sp>
         <p:nvSpPr>
-          <p:cNvPr id="84" name=""/>
+          <p:cNvPr id="89" name=""/>
           <p:cNvSpPr txBox="1"/>
           <p:nvPr/>
         </p:nvSpPr>
@@ -14047,7 +14231,7 @@
       </p:sp>
       <p:sp>
         <p:nvSpPr>
-          <p:cNvPr id="85" name=""/>
+          <p:cNvPr id="90" name=""/>
           <p:cNvSpPr/>
           <p:nvPr/>
         </p:nvSpPr>
@@ -14254,7 +14438,7 @@
       </p:sp>
       <p:sp>
         <p:nvSpPr>
-          <p:cNvPr id="86" name=""/>
+          <p:cNvPr id="91" name=""/>
           <p:cNvSpPr txBox="1"/>
           <p:nvPr/>
         </p:nvSpPr>
@@ -14307,7 +14491,7 @@
       </p:sp>
       <p:sp>
         <p:nvSpPr>
-          <p:cNvPr id="87" name=""/>
+          <p:cNvPr id="92" name=""/>
           <p:cNvSpPr/>
           <p:nvPr/>
         </p:nvSpPr>
@@ -14513,7 +14697,7 @@
       </p:sp>
       <p:sp>
         <p:nvSpPr>
-          <p:cNvPr id="88" name=""/>
+          <p:cNvPr id="93" name=""/>
           <p:cNvSpPr txBox="1"/>
           <p:nvPr/>
         </p:nvSpPr>
@@ -14556,7 +14740,7 @@
       </p:sp>
       <p:sp>
         <p:nvSpPr>
-          <p:cNvPr id="89" name=""/>
+          <p:cNvPr id="94" name=""/>
           <p:cNvSpPr/>
           <p:nvPr/>
         </p:nvSpPr>
@@ -14763,7 +14947,7 @@
       </p:sp>
       <p:sp>
         <p:nvSpPr>
-          <p:cNvPr id="90" name=""/>
+          <p:cNvPr id="95" name=""/>
           <p:cNvSpPr txBox="1"/>
           <p:nvPr/>
         </p:nvSpPr>
@@ -14816,7 +15000,7 @@
       </p:sp>
       <p:sp>
         <p:nvSpPr>
-          <p:cNvPr id="91" name=""/>
+          <p:cNvPr id="96" name=""/>
           <p:cNvSpPr txBox="1"/>
           <p:nvPr/>
         </p:nvSpPr>
@@ -14859,7 +15043,7 @@
       </p:sp>
       <p:sp>
         <p:nvSpPr>
-          <p:cNvPr id="92" name=""/>
+          <p:cNvPr id="97" name=""/>
           <p:cNvSpPr/>
           <p:nvPr/>
         </p:nvSpPr>
@@ -14997,7 +15181,7 @@
       </p:sp>
       <p:sp>
         <p:nvSpPr>
-          <p:cNvPr id="93" name=""/>
+          <p:cNvPr id="98" name=""/>
           <p:cNvSpPr txBox="1"/>
           <p:nvPr/>
         </p:nvSpPr>
@@ -15050,7 +15234,7 @@
       </p:sp>
       <p:sp>
         <p:nvSpPr>
-          <p:cNvPr id="94" name=""/>
+          <p:cNvPr id="99" name=""/>
           <p:cNvSpPr txBox="1"/>
           <p:nvPr/>
         </p:nvSpPr>
@@ -15123,7 +15307,7 @@
       </p:grpSpPr>
       <p:sp>
         <p:nvSpPr>
-          <p:cNvPr id="95" name=""/>
+          <p:cNvPr id="100" name=""/>
           <p:cNvSpPr/>
           <p:nvPr/>
         </p:nvSpPr>
@@ -15181,7 +15365,7 @@
       </p:sp>
       <p:sp>
         <p:nvSpPr>
-          <p:cNvPr id="96" name=""/>
+          <p:cNvPr id="101" name=""/>
           <p:cNvSpPr/>
           <p:nvPr/>
         </p:nvSpPr>
@@ -15239,7 +15423,7 @@
       </p:sp>
       <p:sp>
         <p:nvSpPr>
-          <p:cNvPr id="97" name=""/>
+          <p:cNvPr id="102" name=""/>
           <p:cNvSpPr/>
           <p:nvPr/>
         </p:nvSpPr>
@@ -15297,7 +15481,7 @@
       </p:sp>
       <p:sp>
         <p:nvSpPr>
-          <p:cNvPr id="98" name=""/>
+          <p:cNvPr id="103" name=""/>
           <p:cNvSpPr/>
           <p:nvPr/>
         </p:nvSpPr>
@@ -15513,9 +15697,32 @@
           </a:p>
         </p:txBody>
       </p:sp>
+      <p:pic>
+        <p:nvPicPr>
+          <p:cNvPr id="104" name="" descr=""/>
+          <p:cNvPicPr/>
+          <p:nvPr/>
+        </p:nvPicPr>
+        <p:blipFill>
+          <a:blip r:embed="rId1"/>
+          <a:stretch/>
+        </p:blipFill>
+        <p:spPr>
+          <a:xfrm>
+            <a:off x="10515600" y="38160"/>
+            <a:ext cx="1142640" cy="1142640"/>
+          </a:xfrm>
+          <a:prstGeom prst="rect">
+            <a:avLst/>
+          </a:prstGeom>
+          <a:ln w="0">
+            <a:noFill/>
+          </a:ln>
+        </p:spPr>
+      </p:pic>
       <p:sp>
         <p:nvSpPr>
-          <p:cNvPr id="99" name=""/>
+          <p:cNvPr id="105" name=""/>
           <p:cNvSpPr/>
           <p:nvPr/>
         </p:nvSpPr>
@@ -15721,7 +15928,7 @@
       </p:sp>
       <p:sp>
         <p:nvSpPr>
-          <p:cNvPr id="100" name=""/>
+          <p:cNvPr id="106" name=""/>
           <p:cNvSpPr txBox="1"/>
           <p:nvPr/>
         </p:nvSpPr>
@@ -15784,7 +15991,7 @@
       </p:sp>
       <p:sp>
         <p:nvSpPr>
-          <p:cNvPr id="101" name=""/>
+          <p:cNvPr id="107" name=""/>
           <p:cNvSpPr txBox="1"/>
           <p:nvPr/>
         </p:nvSpPr>
@@ -15827,7 +16034,7 @@
       </p:sp>
       <p:sp>
         <p:nvSpPr>
-          <p:cNvPr id="102" name=""/>
+          <p:cNvPr id="108" name=""/>
           <p:cNvSpPr/>
           <p:nvPr/>
         </p:nvSpPr>
@@ -16033,7 +16240,7 @@
       </p:sp>
       <p:sp>
         <p:nvSpPr>
-          <p:cNvPr id="103" name=""/>
+          <p:cNvPr id="109" name=""/>
           <p:cNvSpPr txBox="1"/>
           <p:nvPr/>
         </p:nvSpPr>
@@ -16076,7 +16283,7 @@
       </p:sp>
       <p:sp>
         <p:nvSpPr>
-          <p:cNvPr id="104" name=""/>
+          <p:cNvPr id="110" name=""/>
           <p:cNvSpPr txBox="1"/>
           <p:nvPr/>
         </p:nvSpPr>
@@ -16119,7 +16326,7 @@
       </p:sp>
       <p:sp>
         <p:nvSpPr>
-          <p:cNvPr id="105" name=""/>
+          <p:cNvPr id="111" name=""/>
           <p:cNvSpPr/>
           <p:nvPr/>
         </p:nvSpPr>
@@ -16325,7 +16532,7 @@
       </p:sp>
       <p:sp>
         <p:nvSpPr>
-          <p:cNvPr id="106" name=""/>
+          <p:cNvPr id="112" name=""/>
           <p:cNvSpPr txBox="1"/>
           <p:nvPr/>
         </p:nvSpPr>
@@ -16388,7 +16595,7 @@
       </p:sp>
       <p:sp>
         <p:nvSpPr>
-          <p:cNvPr id="107" name=""/>
+          <p:cNvPr id="113" name=""/>
           <p:cNvSpPr txBox="1"/>
           <p:nvPr/>
         </p:nvSpPr>
@@ -16441,7 +16648,7 @@
       </p:sp>
       <p:sp>
         <p:nvSpPr>
-          <p:cNvPr id="108" name=""/>
+          <p:cNvPr id="114" name=""/>
           <p:cNvSpPr txBox="1"/>
           <p:nvPr/>
         </p:nvSpPr>
@@ -16484,7 +16691,7 @@
       </p:sp>
       <p:sp>
         <p:nvSpPr>
-          <p:cNvPr id="109" name=""/>
+          <p:cNvPr id="115" name=""/>
           <p:cNvSpPr txBox="1"/>
           <p:nvPr/>
         </p:nvSpPr>
@@ -16537,12 +16744,12 @@
       </p:sp>
       <p:pic>
         <p:nvPicPr>
-          <p:cNvPr id="110" name="" descr=""/>
+          <p:cNvPr id="116" name="" descr=""/>
           <p:cNvPicPr/>
           <p:nvPr/>
         </p:nvPicPr>
         <p:blipFill>
-          <a:blip r:embed="rId1"/>
+          <a:blip r:embed="rId2"/>
           <a:stretch/>
         </p:blipFill>
         <p:spPr>
@@ -16560,7 +16767,7 @@
       </p:pic>
       <p:sp>
         <p:nvSpPr>
-          <p:cNvPr id="111" name=""/>
+          <p:cNvPr id="117" name=""/>
           <p:cNvSpPr txBox="1"/>
           <p:nvPr/>
         </p:nvSpPr>
@@ -16613,7 +16820,7 @@
       </p:sp>
       <p:sp>
         <p:nvSpPr>
-          <p:cNvPr id="112" name=""/>
+          <p:cNvPr id="118" name=""/>
           <p:cNvSpPr txBox="1"/>
           <p:nvPr/>
         </p:nvSpPr>
@@ -16656,7 +16863,7 @@
       </p:sp>
       <p:sp>
         <p:nvSpPr>
-          <p:cNvPr id="113" name=""/>
+          <p:cNvPr id="119" name=""/>
           <p:cNvSpPr txBox="1"/>
           <p:nvPr/>
         </p:nvSpPr>
@@ -16699,7 +16906,7 @@
       </p:sp>
       <p:sp>
         <p:nvSpPr>
-          <p:cNvPr id="114" name=""/>
+          <p:cNvPr id="120" name=""/>
           <p:cNvSpPr txBox="1"/>
           <p:nvPr/>
         </p:nvSpPr>
@@ -16742,7 +16949,7 @@
       </p:sp>
       <p:sp>
         <p:nvSpPr>
-          <p:cNvPr id="115" name=""/>
+          <p:cNvPr id="121" name=""/>
           <p:cNvSpPr/>
           <p:nvPr/>
         </p:nvSpPr>
@@ -16880,7 +17087,7 @@
       </p:sp>
       <p:sp>
         <p:nvSpPr>
-          <p:cNvPr id="116" name=""/>
+          <p:cNvPr id="122" name=""/>
           <p:cNvSpPr txBox="1"/>
           <p:nvPr/>
         </p:nvSpPr>
@@ -16943,7 +17150,7 @@
       </p:sp>
       <p:sp>
         <p:nvSpPr>
-          <p:cNvPr id="117" name=""/>
+          <p:cNvPr id="123" name=""/>
           <p:cNvSpPr txBox="1"/>
           <p:nvPr/>
         </p:nvSpPr>
@@ -17016,7 +17223,7 @@
       </p:grpSpPr>
       <p:sp>
         <p:nvSpPr>
-          <p:cNvPr id="118" name=""/>
+          <p:cNvPr id="124" name=""/>
           <p:cNvSpPr/>
           <p:nvPr/>
         </p:nvSpPr>
@@ -17074,7 +17281,7 @@
       </p:sp>
       <p:sp>
         <p:nvSpPr>
-          <p:cNvPr id="119" name=""/>
+          <p:cNvPr id="125" name=""/>
           <p:cNvSpPr/>
           <p:nvPr/>
         </p:nvSpPr>
@@ -17132,7 +17339,7 @@
       </p:sp>
       <p:sp>
         <p:nvSpPr>
-          <p:cNvPr id="120" name=""/>
+          <p:cNvPr id="126" name=""/>
           <p:cNvSpPr/>
           <p:nvPr/>
         </p:nvSpPr>
@@ -17190,7 +17397,7 @@
       </p:sp>
       <p:sp>
         <p:nvSpPr>
-          <p:cNvPr id="121" name=""/>
+          <p:cNvPr id="127" name=""/>
           <p:cNvSpPr/>
           <p:nvPr/>
         </p:nvSpPr>
@@ -17406,9 +17613,32 @@
           </a:p>
         </p:txBody>
       </p:sp>
+      <p:pic>
+        <p:nvPicPr>
+          <p:cNvPr id="128" name="" descr=""/>
+          <p:cNvPicPr/>
+          <p:nvPr/>
+        </p:nvPicPr>
+        <p:blipFill>
+          <a:blip r:embed="rId1"/>
+          <a:stretch/>
+        </p:blipFill>
+        <p:spPr>
+          <a:xfrm>
+            <a:off x="10515600" y="38160"/>
+            <a:ext cx="1142640" cy="1142640"/>
+          </a:xfrm>
+          <a:prstGeom prst="rect">
+            <a:avLst/>
+          </a:prstGeom>
+          <a:ln w="0">
+            <a:noFill/>
+          </a:ln>
+        </p:spPr>
+      </p:pic>
       <p:sp>
         <p:nvSpPr>
-          <p:cNvPr id="122" name=""/>
+          <p:cNvPr id="129" name=""/>
           <p:cNvSpPr txBox="1"/>
           <p:nvPr/>
         </p:nvSpPr>
@@ -17451,7 +17681,7 @@
       </p:sp>
       <p:sp>
         <p:nvSpPr>
-          <p:cNvPr id="123" name=""/>
+          <p:cNvPr id="130" name=""/>
           <p:cNvSpPr txBox="1"/>
           <p:nvPr/>
         </p:nvSpPr>
@@ -17494,7 +17724,7 @@
       </p:sp>
       <p:sp>
         <p:nvSpPr>
-          <p:cNvPr id="124" name=""/>
+          <p:cNvPr id="131" name=""/>
           <p:cNvSpPr/>
           <p:nvPr/>
         </p:nvSpPr>
@@ -17552,7 +17782,7 @@
       </p:sp>
       <p:sp>
         <p:nvSpPr>
-          <p:cNvPr id="125" name=""/>
+          <p:cNvPr id="132" name=""/>
           <p:cNvSpPr txBox="1"/>
           <p:nvPr/>
         </p:nvSpPr>
@@ -17595,7 +17825,7 @@
       </p:sp>
       <p:sp>
         <p:nvSpPr>
-          <p:cNvPr id="126" name=""/>
+          <p:cNvPr id="133" name=""/>
           <p:cNvSpPr txBox="1"/>
           <p:nvPr/>
         </p:nvSpPr>
@@ -17638,7 +17868,7 @@
       </p:sp>
       <p:sp>
         <p:nvSpPr>
-          <p:cNvPr id="127" name=""/>
+          <p:cNvPr id="134" name=""/>
           <p:cNvSpPr/>
           <p:nvPr/>
         </p:nvSpPr>
@@ -17844,7 +18074,7 @@
       </p:sp>
       <p:sp>
         <p:nvSpPr>
-          <p:cNvPr id="128" name=""/>
+          <p:cNvPr id="135" name=""/>
           <p:cNvSpPr txBox="1"/>
           <p:nvPr/>
         </p:nvSpPr>
@@ -17887,7 +18117,7 @@
       </p:sp>
       <p:sp>
         <p:nvSpPr>
-          <p:cNvPr id="129" name=""/>
+          <p:cNvPr id="136" name=""/>
           <p:cNvSpPr/>
           <p:nvPr/>
         </p:nvSpPr>
@@ -18093,7 +18323,7 @@
       </p:sp>
       <p:sp>
         <p:nvSpPr>
-          <p:cNvPr id="130" name=""/>
+          <p:cNvPr id="137" name=""/>
           <p:cNvSpPr txBox="1"/>
           <p:nvPr/>
         </p:nvSpPr>
@@ -18196,7 +18426,7 @@
       </p:sp>
       <p:sp>
         <p:nvSpPr>
-          <p:cNvPr id="131" name=""/>
+          <p:cNvPr id="138" name=""/>
           <p:cNvSpPr/>
           <p:nvPr/>
         </p:nvSpPr>
@@ -18402,7 +18632,7 @@
       </p:sp>
       <p:sp>
         <p:nvSpPr>
-          <p:cNvPr id="132" name=""/>
+          <p:cNvPr id="139" name=""/>
           <p:cNvSpPr txBox="1"/>
           <p:nvPr/>
         </p:nvSpPr>
@@ -18495,7 +18725,7 @@
       </p:sp>
       <p:sp>
         <p:nvSpPr>
-          <p:cNvPr id="133" name=""/>
+          <p:cNvPr id="140" name=""/>
           <p:cNvSpPr/>
           <p:nvPr/>
         </p:nvSpPr>
@@ -18701,7 +18931,7 @@
       </p:sp>
       <p:sp>
         <p:nvSpPr>
-          <p:cNvPr id="134" name=""/>
+          <p:cNvPr id="141" name=""/>
           <p:cNvSpPr txBox="1"/>
           <p:nvPr/>
         </p:nvSpPr>
@@ -18754,7 +18984,7 @@
       </p:sp>
       <p:sp>
         <p:nvSpPr>
-          <p:cNvPr id="135" name=""/>
+          <p:cNvPr id="142" name=""/>
           <p:cNvSpPr txBox="1"/>
           <p:nvPr/>
         </p:nvSpPr>
@@ -18837,7 +19067,7 @@
       </p:sp>
       <p:sp>
         <p:nvSpPr>
-          <p:cNvPr id="136" name=""/>
+          <p:cNvPr id="143" name=""/>
           <p:cNvSpPr txBox="1"/>
           <p:nvPr/>
         </p:nvSpPr>
@@ -18900,7 +19130,7 @@
       </p:sp>
       <p:sp>
         <p:nvSpPr>
-          <p:cNvPr id="137" name=""/>
+          <p:cNvPr id="144" name=""/>
           <p:cNvSpPr/>
           <p:nvPr/>
         </p:nvSpPr>
@@ -19038,7 +19268,7 @@
       </p:sp>
       <p:sp>
         <p:nvSpPr>
-          <p:cNvPr id="138" name=""/>
+          <p:cNvPr id="145" name=""/>
           <p:cNvSpPr txBox="1"/>
           <p:nvPr/>
         </p:nvSpPr>
@@ -19101,7 +19331,7 @@
       </p:sp>
       <p:sp>
         <p:nvSpPr>
-          <p:cNvPr id="139" name=""/>
+          <p:cNvPr id="146" name=""/>
           <p:cNvSpPr txBox="1"/>
           <p:nvPr/>
         </p:nvSpPr>
@@ -19144,7 +19374,7 @@
       </p:sp>
       <p:sp>
         <p:nvSpPr>
-          <p:cNvPr id="140" name=""/>
+          <p:cNvPr id="147" name=""/>
           <p:cNvSpPr txBox="1"/>
           <p:nvPr/>
         </p:nvSpPr>
@@ -19187,7 +19417,7 @@
       </p:sp>
       <p:sp>
         <p:nvSpPr>
-          <p:cNvPr id="141" name=""/>
+          <p:cNvPr id="148" name=""/>
           <p:cNvSpPr txBox="1"/>
           <p:nvPr/>
         </p:nvSpPr>
@@ -19230,7 +19460,7 @@
       </p:sp>
       <p:sp>
         <p:nvSpPr>
-          <p:cNvPr id="142" name=""/>
+          <p:cNvPr id="149" name=""/>
           <p:cNvSpPr txBox="1"/>
           <p:nvPr/>
         </p:nvSpPr>
@@ -19273,7 +19503,7 @@
       </p:sp>
       <p:sp>
         <p:nvSpPr>
-          <p:cNvPr id="143" name=""/>
+          <p:cNvPr id="150" name=""/>
           <p:cNvSpPr txBox="1"/>
           <p:nvPr/>
         </p:nvSpPr>
@@ -19346,7 +19576,7 @@
       </p:grpSpPr>
       <p:sp>
         <p:nvSpPr>
-          <p:cNvPr id="144" name=""/>
+          <p:cNvPr id="151" name=""/>
           <p:cNvSpPr/>
           <p:nvPr/>
         </p:nvSpPr>
@@ -19404,7 +19634,7 @@
       </p:sp>
       <p:sp>
         <p:nvSpPr>
-          <p:cNvPr id="145" name=""/>
+          <p:cNvPr id="152" name=""/>
           <p:cNvSpPr/>
           <p:nvPr/>
         </p:nvSpPr>
@@ -19462,7 +19692,7 @@
       </p:sp>
       <p:sp>
         <p:nvSpPr>
-          <p:cNvPr id="146" name=""/>
+          <p:cNvPr id="153" name=""/>
           <p:cNvSpPr/>
           <p:nvPr/>
         </p:nvSpPr>
@@ -19520,7 +19750,7 @@
       </p:sp>
       <p:sp>
         <p:nvSpPr>
-          <p:cNvPr id="147" name=""/>
+          <p:cNvPr id="154" name=""/>
           <p:cNvSpPr/>
           <p:nvPr/>
         </p:nvSpPr>
@@ -19736,9 +19966,32 @@
           </a:p>
         </p:txBody>
       </p:sp>
+      <p:pic>
+        <p:nvPicPr>
+          <p:cNvPr id="155" name="" descr=""/>
+          <p:cNvPicPr/>
+          <p:nvPr/>
+        </p:nvPicPr>
+        <p:blipFill>
+          <a:blip r:embed="rId1"/>
+          <a:stretch/>
+        </p:blipFill>
+        <p:spPr>
+          <a:xfrm>
+            <a:off x="10515600" y="38160"/>
+            <a:ext cx="1142640" cy="1142640"/>
+          </a:xfrm>
+          <a:prstGeom prst="rect">
+            <a:avLst/>
+          </a:prstGeom>
+          <a:ln w="0">
+            <a:noFill/>
+          </a:ln>
+        </p:spPr>
+      </p:pic>
       <p:sp>
         <p:nvSpPr>
-          <p:cNvPr id="148" name=""/>
+          <p:cNvPr id="156" name=""/>
           <p:cNvSpPr/>
           <p:nvPr/>
         </p:nvSpPr>
@@ -19944,7 +20197,7 @@
       </p:sp>
       <p:sp>
         <p:nvSpPr>
-          <p:cNvPr id="149" name=""/>
+          <p:cNvPr id="157" name=""/>
           <p:cNvSpPr txBox="1"/>
           <p:nvPr/>
         </p:nvSpPr>
@@ -19987,7 +20240,7 @@
       </p:sp>
       <p:sp>
         <p:nvSpPr>
-          <p:cNvPr id="150" name=""/>
+          <p:cNvPr id="158" name=""/>
           <p:cNvSpPr/>
           <p:nvPr/>
         </p:nvSpPr>
@@ -20194,7 +20447,7 @@
       </p:sp>
       <p:sp>
         <p:nvSpPr>
-          <p:cNvPr id="151" name=""/>
+          <p:cNvPr id="159" name=""/>
           <p:cNvSpPr txBox="1"/>
           <p:nvPr/>
         </p:nvSpPr>
@@ -20267,7 +20520,7 @@
       </p:sp>
       <p:sp>
         <p:nvSpPr>
-          <p:cNvPr id="152" name=""/>
+          <p:cNvPr id="160" name=""/>
           <p:cNvSpPr/>
           <p:nvPr/>
         </p:nvSpPr>
@@ -20474,7 +20727,7 @@
       </p:sp>
       <p:sp>
         <p:nvSpPr>
-          <p:cNvPr id="153" name=""/>
+          <p:cNvPr id="161" name=""/>
           <p:cNvSpPr txBox="1"/>
           <p:nvPr/>
         </p:nvSpPr>
@@ -20517,7 +20770,7 @@
       </p:sp>
       <p:sp>
         <p:nvSpPr>
-          <p:cNvPr id="154" name=""/>
+          <p:cNvPr id="162" name=""/>
           <p:cNvSpPr/>
           <p:nvPr/>
         </p:nvSpPr>
@@ -20723,7 +20976,7 @@
       </p:sp>
       <p:sp>
         <p:nvSpPr>
-          <p:cNvPr id="155" name=""/>
+          <p:cNvPr id="163" name=""/>
           <p:cNvSpPr txBox="1"/>
           <p:nvPr/>
         </p:nvSpPr>
@@ -20766,7 +21019,7 @@
       </p:sp>
       <p:sp>
         <p:nvSpPr>
-          <p:cNvPr id="156" name=""/>
+          <p:cNvPr id="164" name=""/>
           <p:cNvSpPr/>
           <p:nvPr/>
         </p:nvSpPr>
@@ -20973,7 +21226,7 @@
       </p:sp>
       <p:sp>
         <p:nvSpPr>
-          <p:cNvPr id="157" name=""/>
+          <p:cNvPr id="165" name=""/>
           <p:cNvSpPr txBox="1"/>
           <p:nvPr/>
         </p:nvSpPr>
@@ -21016,7 +21269,7 @@
       </p:sp>
       <p:sp>
         <p:nvSpPr>
-          <p:cNvPr id="158" name=""/>
+          <p:cNvPr id="166" name=""/>
           <p:cNvSpPr/>
           <p:nvPr/>
         </p:nvSpPr>
@@ -21223,7 +21476,7 @@
       </p:sp>
       <p:sp>
         <p:nvSpPr>
-          <p:cNvPr id="159" name=""/>
+          <p:cNvPr id="167" name=""/>
           <p:cNvSpPr txBox="1"/>
           <p:nvPr/>
         </p:nvSpPr>
@@ -21266,7 +21519,7 @@
       </p:sp>
       <p:sp>
         <p:nvSpPr>
-          <p:cNvPr id="160" name=""/>
+          <p:cNvPr id="168" name=""/>
           <p:cNvSpPr txBox="1"/>
           <p:nvPr/>
         </p:nvSpPr>
@@ -21309,7 +21562,7 @@
       </p:sp>
       <p:sp>
         <p:nvSpPr>
-          <p:cNvPr id="161" name=""/>
+          <p:cNvPr id="169" name=""/>
           <p:cNvSpPr txBox="1"/>
           <p:nvPr/>
         </p:nvSpPr>
@@ -21352,7 +21605,7 @@
       </p:sp>
       <p:sp>
         <p:nvSpPr>
-          <p:cNvPr id="162" name=""/>
+          <p:cNvPr id="170" name=""/>
           <p:cNvSpPr/>
           <p:nvPr/>
         </p:nvSpPr>
@@ -21490,7 +21743,7 @@
       </p:sp>
       <p:sp>
         <p:nvSpPr>
-          <p:cNvPr id="163" name=""/>
+          <p:cNvPr id="171" name=""/>
           <p:cNvSpPr txBox="1"/>
           <p:nvPr/>
         </p:nvSpPr>
@@ -21553,7 +21806,7 @@
       </p:sp>
       <p:sp>
         <p:nvSpPr>
-          <p:cNvPr id="164" name=""/>
+          <p:cNvPr id="172" name=""/>
           <p:cNvSpPr txBox="1"/>
           <p:nvPr/>
         </p:nvSpPr>
@@ -21626,7 +21879,7 @@
       </p:grpSpPr>
       <p:sp>
         <p:nvSpPr>
-          <p:cNvPr id="165" name=""/>
+          <p:cNvPr id="173" name=""/>
           <p:cNvSpPr/>
           <p:nvPr/>
         </p:nvSpPr>
@@ -21684,7 +21937,7 @@
       </p:sp>
       <p:sp>
         <p:nvSpPr>
-          <p:cNvPr id="166" name=""/>
+          <p:cNvPr id="174" name=""/>
           <p:cNvSpPr/>
           <p:nvPr/>
         </p:nvSpPr>
@@ -21742,7 +21995,7 @@
       </p:sp>
       <p:sp>
         <p:nvSpPr>
-          <p:cNvPr id="167" name=""/>
+          <p:cNvPr id="175" name=""/>
           <p:cNvSpPr/>
           <p:nvPr/>
         </p:nvSpPr>
@@ -21800,7 +22053,7 @@
       </p:sp>
       <p:sp>
         <p:nvSpPr>
-          <p:cNvPr id="168" name=""/>
+          <p:cNvPr id="176" name=""/>
           <p:cNvSpPr/>
           <p:nvPr/>
         </p:nvSpPr>
@@ -22016,9 +22269,32 @@
           </a:p>
         </p:txBody>
       </p:sp>
+      <p:pic>
+        <p:nvPicPr>
+          <p:cNvPr id="177" name="" descr=""/>
+          <p:cNvPicPr/>
+          <p:nvPr/>
+        </p:nvPicPr>
+        <p:blipFill>
+          <a:blip r:embed="rId1"/>
+          <a:stretch/>
+        </p:blipFill>
+        <p:spPr>
+          <a:xfrm>
+            <a:off x="10515600" y="38160"/>
+            <a:ext cx="1142640" cy="1142640"/>
+          </a:xfrm>
+          <a:prstGeom prst="rect">
+            <a:avLst/>
+          </a:prstGeom>
+          <a:ln w="0">
+            <a:noFill/>
+          </a:ln>
+        </p:spPr>
+      </p:pic>
       <p:sp>
         <p:nvSpPr>
-          <p:cNvPr id="169" name=""/>
+          <p:cNvPr id="178" name=""/>
           <p:cNvSpPr/>
           <p:nvPr/>
         </p:nvSpPr>
@@ -22224,7 +22500,7 @@
       </p:sp>
       <p:sp>
         <p:nvSpPr>
-          <p:cNvPr id="170" name=""/>
+          <p:cNvPr id="179" name=""/>
           <p:cNvSpPr txBox="1"/>
           <p:nvPr/>
         </p:nvSpPr>
@@ -22267,7 +22543,7 @@
       </p:sp>
       <p:sp>
         <p:nvSpPr>
-          <p:cNvPr id="171" name=""/>
+          <p:cNvPr id="180" name=""/>
           <p:cNvSpPr/>
           <p:nvPr/>
         </p:nvSpPr>
@@ -22474,7 +22750,7 @@
       </p:sp>
       <p:sp>
         <p:nvSpPr>
-          <p:cNvPr id="172" name=""/>
+          <p:cNvPr id="181" name=""/>
           <p:cNvSpPr txBox="1"/>
           <p:nvPr/>
         </p:nvSpPr>
@@ -22517,7 +22793,7 @@
       </p:sp>
       <p:sp>
         <p:nvSpPr>
-          <p:cNvPr id="173" name=""/>
+          <p:cNvPr id="182" name=""/>
           <p:cNvSpPr/>
           <p:nvPr/>
         </p:nvSpPr>
@@ -22724,7 +23000,7 @@
       </p:sp>
       <p:sp>
         <p:nvSpPr>
-          <p:cNvPr id="174" name=""/>
+          <p:cNvPr id="183" name=""/>
           <p:cNvSpPr txBox="1"/>
           <p:nvPr/>
         </p:nvSpPr>
@@ -22767,7 +23043,7 @@
       </p:sp>
       <p:sp>
         <p:nvSpPr>
-          <p:cNvPr id="175" name=""/>
+          <p:cNvPr id="184" name=""/>
           <p:cNvSpPr/>
           <p:nvPr/>
         </p:nvSpPr>
@@ -22973,7 +23249,7 @@
       </p:sp>
       <p:sp>
         <p:nvSpPr>
-          <p:cNvPr id="176" name=""/>
+          <p:cNvPr id="185" name=""/>
           <p:cNvSpPr txBox="1"/>
           <p:nvPr/>
         </p:nvSpPr>
@@ -23016,7 +23292,7 @@
       </p:sp>
       <p:sp>
         <p:nvSpPr>
-          <p:cNvPr id="177" name=""/>
+          <p:cNvPr id="186" name=""/>
           <p:cNvSpPr/>
           <p:nvPr/>
         </p:nvSpPr>
@@ -23223,7 +23499,7 @@
       </p:sp>
       <p:sp>
         <p:nvSpPr>
-          <p:cNvPr id="178" name=""/>
+          <p:cNvPr id="187" name=""/>
           <p:cNvSpPr txBox="1"/>
           <p:nvPr/>
         </p:nvSpPr>
@@ -23286,7 +23562,7 @@
       </p:sp>
       <p:sp>
         <p:nvSpPr>
-          <p:cNvPr id="179" name=""/>
+          <p:cNvPr id="188" name=""/>
           <p:cNvSpPr txBox="1"/>
           <p:nvPr/>
         </p:nvSpPr>
@@ -23329,7 +23605,7 @@
       </p:sp>
       <p:sp>
         <p:nvSpPr>
-          <p:cNvPr id="180" name=""/>
+          <p:cNvPr id="189" name=""/>
           <p:cNvSpPr txBox="1"/>
           <p:nvPr/>
         </p:nvSpPr>
@@ -23432,7 +23708,7 @@
       </p:sp>
       <p:sp>
         <p:nvSpPr>
-          <p:cNvPr id="181" name=""/>
+          <p:cNvPr id="190" name=""/>
           <p:cNvSpPr/>
           <p:nvPr/>
         </p:nvSpPr>
@@ -23570,7 +23846,7 @@
       </p:sp>
       <p:sp>
         <p:nvSpPr>
-          <p:cNvPr id="182" name=""/>
+          <p:cNvPr id="191" name=""/>
           <p:cNvSpPr txBox="1"/>
           <p:nvPr/>
         </p:nvSpPr>
@@ -23633,7 +23909,7 @@
       </p:sp>
       <p:sp>
         <p:nvSpPr>
-          <p:cNvPr id="183" name=""/>
+          <p:cNvPr id="192" name=""/>
           <p:cNvSpPr txBox="1"/>
           <p:nvPr/>
         </p:nvSpPr>
